--- a/slides/decks/s02-evaluation-conditioning.pptx
+++ b/slides/decks/s02-evaluation-conditioning.pptx
@@ -137,19 +137,19 @@
   <p:extLst>
     <p:ext uri="{521415D9-36F7-43E2-AB2F-B90AF26B5E84}">
       <p14:sectionLst xmlns:p14="http://schemas.microsoft.com/office/powerpoint/2010/main">
-        <p14:section name="Opening" id="{03030a22-15e1-377a-860d-39bde15deace}">
+        <p14:section name="Opening" id="{be2d218f-48e2-4ba7-eac9-f4265e3a9191}">
           <p14:sldIdLst>
             <p14:sldId id="256"/>
             <p14:sldId id="257"/>
           </p14:sldIdLst>
         </p14:section>
-        <p14:section name="Work-up and risk factors" id="{567a4502-fbe3-ccca-a656-90e79e0922ab}">
+        <p14:section name="Work-up and risk factors" id="{43e98c63-08ff-6631-5eac-57ef1baa5c43}">
           <p14:sldIdLst>
             <p14:sldId id="258"/>
             <p14:sldId id="259"/>
           </p14:sldIdLst>
         </p14:section>
-        <p14:section name="Risk scores" id="{b74982ba-c657-12e6-0a94-2c78d8cdb2d6}">
+        <p14:section name="Risk scores" id="{746d3194-e13e-642d-242c-af2faf49c05d}">
           <p14:sldIdLst>
             <p14:sldId id="260"/>
             <p14:sldId id="261"/>
@@ -157,7 +157,7 @@
             <p14:sldId id="263"/>
           </p14:sldIdLst>
         </p14:section>
-        <p14:section name="Conditioning" id="{00f20b62-1ae9-acc8-d4f4-636a326f9fbb}">
+        <p14:section name="Conditioning" id="{d61c4d72-7f26-9cd0-6942-153f0d91fb20}">
           <p14:sldIdLst>
             <p14:sldId id="264"/>
             <p14:sldId id="265"/>
@@ -167,13 +167,13 @@
             <p14:sldId id="269"/>
           </p14:sldIdLst>
         </p14:section>
-        <p14:section name="Special populations" id="{2fa787a1-2e1e-851a-8f85-652d6fb59e44}">
+        <p14:section name="Special populations" id="{09564ba9-dd5c-7423-a723-2e9b11fc513a}">
           <p14:sldIdLst>
             <p14:sldId id="270"/>
             <p14:sldId id="271"/>
           </p14:sldIdLst>
         </p14:section>
-        <p14:section name="Board questions" id="{6d755337-9b24-4431-26d8-9fafe60e7de0}">
+        <p14:section name="Board questions" id="{adf2bf40-35ae-ee22-911b-341626a90005}">
           <p14:sldIdLst>
             <p14:sldId id="272"/>
             <p14:sldId id="273"/>
@@ -183,7 +183,7 @@
             <p14:sldId id="277"/>
           </p14:sldIdLst>
         </p14:section>
-        <p14:section name="References" id="{cb49b171-02f1-0130-a1ea-942ec9945b05}">
+        <p14:section name="References" id="{4a1d2b4d-66f5-cb65-1b14-2991017afa4a}">
           <p14:sldIdLst>
             <p14:sldId id="278"/>
             <p14:sldId id="279"/>
@@ -192,7 +192,7 @@
             <p14:sldId id="282"/>
           </p14:sldIdLst>
         </p14:section>
-        <p14:section name="Backup" id="{564265b4-bdc3-7758-4317-4d480517d2e1}">
+        <p14:section name="Backup" id="{5b1b1ebc-0e58-b898-f8af-e1c914284070}">
           <p14:sldIdLst>
             <p14:sldId id="283"/>
             <p14:sldId id="284"/>
@@ -7860,7 +7860,7 @@
                   <a:schemeClr val="tx1"/>
                 </a:solidFill>
               </a:rPr>
-              <a:t>Busulfan moved from oral dosing to IV drug with fludarabine</a:t>
+              <a:t>Busulfan moved from oral dosing to IV, then paired with fludarabine</a:t>
             </a:r>
             <a:endParaRPr lang="en-US" sz="3600" dirty="0"/>
           </a:p>
@@ -10084,7 +10084,7 @@
                   <a:schemeClr val="tx1"/>
                 </a:solidFill>
               </a:rPr>
-              <a:t>Haplo-HCT runs on two non-T-cell-depleted platforms</a:t>
+              <a:t>Haplo uses PTCY or ATG platforms; cord blood uses TBI or TBF</a:t>
             </a:r>
             <a:endParaRPr lang="en-US" sz="3600" dirty="0"/>
           </a:p>
@@ -21924,8 +21924,8 @@
               <a:tblPr/>
               <a:tblGrid>
                 <a:gridCol w="2423160"/>
-                <a:gridCol w="4663440"/>
-                <a:gridCol w="3730752"/>
+                <a:gridCol w="4288536"/>
+                <a:gridCol w="4105656"/>
               </a:tblGrid>
               <a:tr h="0">
                 <a:tc>
@@ -22689,7 +22689,7 @@
         </p:nvSpPr>
         <p:spPr>
           <a:xfrm>
-            <a:off x="685800" y="4480560"/>
+            <a:off x="685800" y="4937760"/>
             <a:ext cx="10817352" cy="411480"/>
           </a:xfrm>
           <a:prstGeom prst="rect">
@@ -24275,16 +24275,16 @@
         </p:nvGraphicFramePr>
         <p:xfrm>
           <a:off x="685800" y="2240280"/>
-          <a:ext cx="10817352" cy="914400"/>
+          <a:ext cx="10826496" cy="914400"/>
         </p:xfrm>
         <a:graphic>
           <a:graphicData uri="http://schemas.openxmlformats.org/drawingml/2006/table">
             <a:tbl>
               <a:tblPr/>
               <a:tblGrid>
-                <a:gridCol w="2423160"/>
-                <a:gridCol w="5038344"/>
-                <a:gridCol w="3355848"/>
+                <a:gridCol w="2130552"/>
+                <a:gridCol w="5641848"/>
+                <a:gridCol w="3054096"/>
               </a:tblGrid>
               <a:tr h="0">
                 <a:tc>
@@ -26532,7 +26532,7 @@
         </p:nvSpPr>
         <p:spPr>
           <a:xfrm>
-            <a:off x="685800" y="4343400"/>
+            <a:off x="685800" y="4800600"/>
             <a:ext cx="10817352" cy="411480"/>
           </a:xfrm>
           <a:prstGeom prst="rect">
@@ -28929,7 +28929,21 @@
                             <a:schemeClr val="tx1"/>
                           </a:solidFill>
                         </a:rPr>
-                        <a:t>Irreversible in most; often &gt; 21 days</a:t>
+                        <a:t>Irreversible in most;</a:t>
+                      </a:r>
+                      <a:endParaRPr lang="en-US" sz="1700" dirty="0"/>
+                    </a:p>
+                    <a:p>
+                      <a:pPr indent="0" marL="0">
+                        <a:buNone/>
+                      </a:pPr>
+                      <a:r>
+                        <a:rPr lang="en-US" sz="1700" dirty="0">
+                          <a:solidFill>
+                            <a:schemeClr val="tx1"/>
+                          </a:solidFill>
+                        </a:rPr>
+                        <a:t>often &gt; 21 days</a:t>
                       </a:r>
                       <a:endParaRPr lang="en-US" sz="1700" dirty="0"/>
                     </a:p>
@@ -29525,7 +29539,21 @@
                             <a:schemeClr val="tx1"/>
                           </a:solidFill>
                         </a:rPr>
-                        <a:t>Theoretically not needed</a:t>
+                        <a:t>Theoretically</a:t>
+                      </a:r>
+                      <a:endParaRPr lang="en-US" sz="1700" dirty="0"/>
+                    </a:p>
+                    <a:p>
+                      <a:pPr indent="0" marL="0">
+                        <a:buNone/>
+                      </a:pPr>
+                      <a:r>
+                        <a:rPr lang="en-US" sz="1700" dirty="0">
+                          <a:solidFill>
+                            <a:schemeClr val="tx1"/>
+                          </a:solidFill>
+                        </a:rPr>
+                        <a:t>not needed</a:t>
                       </a:r>
                       <a:endParaRPr lang="en-US" sz="1700" dirty="0"/>
                     </a:p>
@@ -29604,7 +29632,7 @@
         </p:nvSpPr>
         <p:spPr>
           <a:xfrm>
-            <a:off x="685800" y="4754880"/>
+            <a:off x="685800" y="5257800"/>
             <a:ext cx="10817352" cy="411480"/>
           </a:xfrm>
           <a:prstGeom prst="rect">

--- a/slides/decks/s02-evaluation-conditioning.pptx
+++ b/slides/decks/s02-evaluation-conditioning.pptx
@@ -137,19 +137,19 @@
   <p:extLst>
     <p:ext uri="{521415D9-36F7-43E2-AB2F-B90AF26B5E84}">
       <p14:sectionLst xmlns:p14="http://schemas.microsoft.com/office/powerpoint/2010/main">
-        <p14:section name="Opening" id="{be2d218f-48e2-4ba7-eac9-f4265e3a9191}">
+        <p14:section name="Opening" id="{e873826a-4424-c892-741b-60c05f538833}">
           <p14:sldIdLst>
             <p14:sldId id="256"/>
             <p14:sldId id="257"/>
           </p14:sldIdLst>
         </p14:section>
-        <p14:section name="Work-up and risk factors" id="{43e98c63-08ff-6631-5eac-57ef1baa5c43}">
+        <p14:section name="Work-up and risk factors" id="{6e6126e4-356a-31af-fba7-8b06d78f13c1}">
           <p14:sldIdLst>
             <p14:sldId id="258"/>
             <p14:sldId id="259"/>
           </p14:sldIdLst>
         </p14:section>
-        <p14:section name="Risk scores" id="{746d3194-e13e-642d-242c-af2faf49c05d}">
+        <p14:section name="Risk scores" id="{d32205b5-9e93-ce9e-482d-ef6812d02892}">
           <p14:sldIdLst>
             <p14:sldId id="260"/>
             <p14:sldId id="261"/>
@@ -157,7 +157,7 @@
             <p14:sldId id="263"/>
           </p14:sldIdLst>
         </p14:section>
-        <p14:section name="Conditioning" id="{d61c4d72-7f26-9cd0-6942-153f0d91fb20}">
+        <p14:section name="Conditioning" id="{53a7590b-43d0-54b9-cf1e-778391098e2a}">
           <p14:sldIdLst>
             <p14:sldId id="264"/>
             <p14:sldId id="265"/>
@@ -167,13 +167,13 @@
             <p14:sldId id="269"/>
           </p14:sldIdLst>
         </p14:section>
-        <p14:section name="Special populations" id="{09564ba9-dd5c-7423-a723-2e9b11fc513a}">
+        <p14:section name="Special populations" id="{bf448811-9276-a034-0131-a7a7b3eb6b37}">
           <p14:sldIdLst>
             <p14:sldId id="270"/>
             <p14:sldId id="271"/>
           </p14:sldIdLst>
         </p14:section>
-        <p14:section name="Board questions" id="{adf2bf40-35ae-ee22-911b-341626a90005}">
+        <p14:section name="Board questions" id="{12dbec63-ba11-8219-efa7-59770563cb4a}">
           <p14:sldIdLst>
             <p14:sldId id="272"/>
             <p14:sldId id="273"/>
@@ -183,7 +183,7 @@
             <p14:sldId id="277"/>
           </p14:sldIdLst>
         </p14:section>
-        <p14:section name="References" id="{4a1d2b4d-66f5-cb65-1b14-2991017afa4a}">
+        <p14:section name="References" id="{6e2fa9b4-37a6-740e-cf2d-fe7535e04b5d}">
           <p14:sldIdLst>
             <p14:sldId id="278"/>
             <p14:sldId id="279"/>
@@ -192,7 +192,7 @@
             <p14:sldId id="282"/>
           </p14:sldIdLst>
         </p14:section>
-        <p14:section name="Backup" id="{5b1b1ebc-0e58-b898-f8af-e1c914284070}">
+        <p14:section name="Backup" id="{2623b768-7d3e-6db3-52c4-4844d64d63fa}">
           <p14:sldIdLst>
             <p14:sldId id="283"/>
             <p14:sldId id="284"/>

--- a/slides/decks/s02-evaluation-conditioning.pptx
+++ b/slides/decks/s02-evaluation-conditioning.pptx
@@ -137,19 +137,19 @@
   <p:extLst>
     <p:ext uri="{521415D9-36F7-43E2-AB2F-B90AF26B5E84}">
       <p14:sectionLst xmlns:p14="http://schemas.microsoft.com/office/powerpoint/2010/main">
-        <p14:section name="Opening" id="{e873826a-4424-c892-741b-60c05f538833}">
+        <p14:section name="Opening" id="{26ce4f30-f011-e712-7876-a5a2dc619a1a}">
           <p14:sldIdLst>
             <p14:sldId id="256"/>
             <p14:sldId id="257"/>
           </p14:sldIdLst>
         </p14:section>
-        <p14:section name="Work-up and risk factors" id="{6e6126e4-356a-31af-fba7-8b06d78f13c1}">
+        <p14:section name="Work-up and risk factors" id="{8a86803e-2a8f-6175-5ebc-33f4d2a9326e}">
           <p14:sldIdLst>
             <p14:sldId id="258"/>
             <p14:sldId id="259"/>
           </p14:sldIdLst>
         </p14:section>
-        <p14:section name="Risk scores" id="{d32205b5-9e93-ce9e-482d-ef6812d02892}">
+        <p14:section name="Risk scores" id="{1713fb65-217f-e7ca-3ed1-2c8e2d9481f6}">
           <p14:sldIdLst>
             <p14:sldId id="260"/>
             <p14:sldId id="261"/>
@@ -157,7 +157,7 @@
             <p14:sldId id="263"/>
           </p14:sldIdLst>
         </p14:section>
-        <p14:section name="Conditioning" id="{53a7590b-43d0-54b9-cf1e-778391098e2a}">
+        <p14:section name="Conditioning" id="{acc0bfb1-b223-71d9-448b-6ec8861bc64b}">
           <p14:sldIdLst>
             <p14:sldId id="264"/>
             <p14:sldId id="265"/>
@@ -167,13 +167,13 @@
             <p14:sldId id="269"/>
           </p14:sldIdLst>
         </p14:section>
-        <p14:section name="Special populations" id="{bf448811-9276-a034-0131-a7a7b3eb6b37}">
+        <p14:section name="Special populations" id="{92c18e40-7911-b6e7-13d0-3106bb9ce341}">
           <p14:sldIdLst>
             <p14:sldId id="270"/>
             <p14:sldId id="271"/>
           </p14:sldIdLst>
         </p14:section>
-        <p14:section name="Board questions" id="{12dbec63-ba11-8219-efa7-59770563cb4a}">
+        <p14:section name="Board questions" id="{04e068bc-7580-bc7f-b920-637274e5ccc3}">
           <p14:sldIdLst>
             <p14:sldId id="272"/>
             <p14:sldId id="273"/>
@@ -183,7 +183,7 @@
             <p14:sldId id="277"/>
           </p14:sldIdLst>
         </p14:section>
-        <p14:section name="References" id="{6e2fa9b4-37a6-740e-cf2d-fe7535e04b5d}">
+        <p14:section name="References" id="{aa243c94-d62b-bc89-ef45-ec0fc58f7480}">
           <p14:sldIdLst>
             <p14:sldId id="278"/>
             <p14:sldId id="279"/>
@@ -192,7 +192,7 @@
             <p14:sldId id="282"/>
           </p14:sldIdLst>
         </p14:section>
-        <p14:section name="Backup" id="{2623b768-7d3e-6db3-52c4-4844d64d63fa}">
+        <p14:section name="Backup" id="{4ad5e596-d563-7f06-72b8-df0dc9f8aad6}">
           <p14:sldIdLst>
             <p14:sldId id="283"/>
             <p14:sldId id="284"/>
@@ -620,7 +620,7 @@
             </a:pPr>
             <a:r>
               <a:rPr lang="en-US" dirty="0"/>
-              <a:t>大家好，第二週的主題是移植前評估和 conditioning，對應 EBMT Handbook 第 11 章和第 13 章，另外帶到第 67 章肥胖病人和第 68 章老年病人。誰適合移植、風險有多高、conditioning 要用多強，這些問題在病人住進移植病房之前就要回答完。這三十分鐘會把常考的 score 和 regimen 走過一遍，最後一樣是三題 board-style 題目。</a:t>
+              <a:t>大家好，第 2 堂的主題是移植前評估和 conditioning，對應 EBMT Handbook 第 11 章和第 13 章，另外帶到第 67 章肥胖病人和第 68 章老年病人。誰適合移植、風險有多高、conditioning 要用多強，這些問題在病人住進移植病房之前就要回答完。這三十分鐘會把常考的 score 和 regimen 走過一遍，最後一樣是三題 board-style 題目。</a:t>
             </a:r>
           </a:p>
         </p:txBody>
@@ -5388,7 +5388,7 @@
                   <a:schemeClr val="tx1"/>
                 </a:solidFill>
               </a:rPr>
-              <a:t>Week 2 · Ch. 11, 13 (with Ch. 67, 68)</a:t>
+              <a:t>Session 02 · Ch. 11, 13 (with Ch. 67, 68)</a:t>
             </a:r>
             <a:endParaRPr lang="en-US" sz="2000" dirty="0"/>
           </a:p>

--- a/slides/decks/s02-evaluation-conditioning.pptx
+++ b/slides/decks/s02-evaluation-conditioning.pptx
@@ -137,19 +137,19 @@
   <p:extLst>
     <p:ext uri="{521415D9-36F7-43E2-AB2F-B90AF26B5E84}">
       <p14:sectionLst xmlns:p14="http://schemas.microsoft.com/office/powerpoint/2010/main">
-        <p14:section name="Opening" id="{26ce4f30-f011-e712-7876-a5a2dc619a1a}">
+        <p14:section name="Opening" id="{bec8db67-dec0-6efd-4b73-23a7bf088816}">
           <p14:sldIdLst>
             <p14:sldId id="256"/>
             <p14:sldId id="257"/>
           </p14:sldIdLst>
         </p14:section>
-        <p14:section name="Work-up and risk factors" id="{8a86803e-2a8f-6175-5ebc-33f4d2a9326e}">
+        <p14:section name="Work-up and risk factors" id="{1a6c6b7a-c8d8-af5d-345a-425da5285b94}">
           <p14:sldIdLst>
             <p14:sldId id="258"/>
             <p14:sldId id="259"/>
           </p14:sldIdLst>
         </p14:section>
-        <p14:section name="Risk scores" id="{1713fb65-217f-e7ca-3ed1-2c8e2d9481f6}">
+        <p14:section name="Risk scores" id="{7196df3a-7fae-59e6-f4b4-038712901fd0}">
           <p14:sldIdLst>
             <p14:sldId id="260"/>
             <p14:sldId id="261"/>
@@ -157,7 +157,7 @@
             <p14:sldId id="263"/>
           </p14:sldIdLst>
         </p14:section>
-        <p14:section name="Conditioning" id="{acc0bfb1-b223-71d9-448b-6ec8861bc64b}">
+        <p14:section name="Conditioning" id="{73138e0b-38af-f6e7-5abc-1d67b3a17e08}">
           <p14:sldIdLst>
             <p14:sldId id="264"/>
             <p14:sldId id="265"/>
@@ -167,13 +167,13 @@
             <p14:sldId id="269"/>
           </p14:sldIdLst>
         </p14:section>
-        <p14:section name="Special populations" id="{92c18e40-7911-b6e7-13d0-3106bb9ce341}">
+        <p14:section name="Special populations" id="{b1544c9e-3d90-f63a-863c-d8f78110a69d}">
           <p14:sldIdLst>
             <p14:sldId id="270"/>
             <p14:sldId id="271"/>
           </p14:sldIdLst>
         </p14:section>
-        <p14:section name="Board questions" id="{04e068bc-7580-bc7f-b920-637274e5ccc3}">
+        <p14:section name="Board questions" id="{cf335a79-dbc0-cb96-f5e6-054f507e39a3}">
           <p14:sldIdLst>
             <p14:sldId id="272"/>
             <p14:sldId id="273"/>
@@ -183,7 +183,7 @@
             <p14:sldId id="277"/>
           </p14:sldIdLst>
         </p14:section>
-        <p14:section name="References" id="{aa243c94-d62b-bc89-ef45-ec0fc58f7480}">
+        <p14:section name="References" id="{3a838b8e-9d9e-96bf-0f8c-7b2957700207}">
           <p14:sldIdLst>
             <p14:sldId id="278"/>
             <p14:sldId id="279"/>
@@ -192,7 +192,7 @@
             <p14:sldId id="282"/>
           </p14:sldIdLst>
         </p14:section>
-        <p14:section name="Backup" id="{4ad5e596-d563-7f06-72b8-df0dc9f8aad6}">
+        <p14:section name="Backup" id="{20af5112-531b-f8f3-cced-90d4fd573145}">
           <p14:sldIdLst>
             <p14:sldId id="283"/>
             <p14:sldId id="284"/>
@@ -620,7 +620,7 @@
             </a:pPr>
             <a:r>
               <a:rPr lang="en-US" dirty="0"/>
-              <a:t>大家好，第 2 堂的主題是移植前評估和 conditioning，對應 EBMT Handbook 第 11 章和第 13 章，另外帶到第 67 章肥胖病人和第 68 章老年病人。誰適合移植、風險有多高、conditioning 要用多強，這些問題在病人住進移植病房之前就要回答完。這三十分鐘會把常考的 score 和 regimen 走過一遍，最後一樣是三題 board-style 題目。</a:t>
+              <a:t>大家好，第 2 堂的主題是移植前評估和 conditioning，對應 EBMT Handbook 第 11 章和第 13 章，另外帶到第 67 章肥胖病人和第 68 章老年病人。誰適合移植、風險有多高、conditioning 要用多強，這些問題在病人住進移植病房之前就要回答完。這三十分鐘會把常考的 score 和 regimen 走過一遍，最後三題 board-style 題目。</a:t>
             </a:r>
           </a:p>
         </p:txBody>
